--- a/atmos-sim/docs/Sandisk_ATMOS_AI_Appliance_Leadership_Proposal_v2.pptx
+++ b/atmos-sim/docs/Sandisk_ATMOS_AI_Appliance_Leadership_Proposal_v2.pptx
@@ -2445,7 +2445,7 @@
           <a:p>
             <a:fld id="{5BCAD085-E8A6-8845-BD4E-CB4CCA059FC4}" type="datetimeFigureOut">
               <a:rPr lang="en-US" smtClean="0"/>
-              <a:t>10/6/26</a:t>
+              <a:t>10/7/26</a:t>
             </a:fld>
             <a:endParaRPr lang="en-US"/>
           </a:p>
@@ -2613,7 +2613,7 @@
           <a:p>
             <a:fld id="{5BCAD085-E8A6-8845-BD4E-CB4CCA059FC4}" type="datetimeFigureOut">
               <a:rPr lang="en-US" smtClean="0"/>
-              <a:t>10/6/26</a:t>
+              <a:t>10/7/26</a:t>
             </a:fld>
             <a:endParaRPr lang="en-US"/>
           </a:p>
@@ -2791,7 +2791,7 @@
           <a:p>
             <a:fld id="{5BCAD085-E8A6-8845-BD4E-CB4CCA059FC4}" type="datetimeFigureOut">
               <a:rPr lang="en-US" smtClean="0"/>
-              <a:t>10/6/26</a:t>
+              <a:t>10/7/26</a:t>
             </a:fld>
             <a:endParaRPr lang="en-US"/>
           </a:p>
@@ -3073,7 +3073,7 @@
           </a:prstGeom>
           <a:extLst>
             <a:ext uri="{C572A759-6A51-4108-AA02-DFA0A04FC94B}">
-              <ma14:wrappingTextBoxFlag xmlns="" xmlns:ma14="http://schemas.microsoft.com/office/mac/drawingml/2011/main" val="0"/>
+              <ma14:wrappingTextBoxFlag xmlns:ma14="http://schemas.microsoft.com/office/mac/drawingml/2011/main" xmlns="" val="0"/>
             </a:ext>
           </a:extLst>
         </p:spPr>
@@ -3218,7 +3218,7 @@
           <a:p>
             <a:fld id="{5BCAD085-E8A6-8845-BD4E-CB4CCA059FC4}" type="datetimeFigureOut">
               <a:rPr lang="en-US" smtClean="0"/>
-              <a:t>10/6/26</a:t>
+              <a:t>10/7/26</a:t>
             </a:fld>
             <a:endParaRPr lang="en-US"/>
           </a:p>
@@ -3463,7 +3463,7 @@
           <a:p>
             <a:fld id="{5BCAD085-E8A6-8845-BD4E-CB4CCA059FC4}" type="datetimeFigureOut">
               <a:rPr lang="en-US" smtClean="0"/>
-              <a:t>10/6/26</a:t>
+              <a:t>10/7/26</a:t>
             </a:fld>
             <a:endParaRPr lang="en-US"/>
           </a:p>
@@ -3748,7 +3748,7 @@
           <a:p>
             <a:fld id="{5BCAD085-E8A6-8845-BD4E-CB4CCA059FC4}" type="datetimeFigureOut">
               <a:rPr lang="en-US" smtClean="0"/>
-              <a:t>10/6/26</a:t>
+              <a:t>10/7/26</a:t>
             </a:fld>
             <a:endParaRPr lang="en-US"/>
           </a:p>
@@ -4167,7 +4167,7 @@
           <a:p>
             <a:fld id="{5BCAD085-E8A6-8845-BD4E-CB4CCA059FC4}" type="datetimeFigureOut">
               <a:rPr lang="en-US" smtClean="0"/>
-              <a:t>10/6/26</a:t>
+              <a:t>10/7/26</a:t>
             </a:fld>
             <a:endParaRPr lang="en-US"/>
           </a:p>
@@ -4284,7 +4284,7 @@
           <a:p>
             <a:fld id="{5BCAD085-E8A6-8845-BD4E-CB4CCA059FC4}" type="datetimeFigureOut">
               <a:rPr lang="en-US" smtClean="0"/>
-              <a:t>10/6/26</a:t>
+              <a:t>10/7/26</a:t>
             </a:fld>
             <a:endParaRPr lang="en-US"/>
           </a:p>
@@ -4379,7 +4379,7 @@
           <a:p>
             <a:fld id="{5BCAD085-E8A6-8845-BD4E-CB4CCA059FC4}" type="datetimeFigureOut">
               <a:rPr lang="en-US" smtClean="0"/>
-              <a:t>10/6/26</a:t>
+              <a:t>10/7/26</a:t>
             </a:fld>
             <a:endParaRPr lang="en-US"/>
           </a:p>
@@ -4654,7 +4654,7 @@
           <a:p>
             <a:fld id="{5BCAD085-E8A6-8845-BD4E-CB4CCA059FC4}" type="datetimeFigureOut">
               <a:rPr lang="en-US" smtClean="0"/>
-              <a:t>10/6/26</a:t>
+              <a:t>10/7/26</a:t>
             </a:fld>
             <a:endParaRPr lang="en-US"/>
           </a:p>
@@ -4906,7 +4906,7 @@
           <a:p>
             <a:fld id="{5BCAD085-E8A6-8845-BD4E-CB4CCA059FC4}" type="datetimeFigureOut">
               <a:rPr lang="en-US" smtClean="0"/>
-              <a:t>10/6/26</a:t>
+              <a:t>10/7/26</a:t>
             </a:fld>
             <a:endParaRPr lang="en-US"/>
           </a:p>
@@ -5117,7 +5117,7 @@
           <a:p>
             <a:fld id="{5BCAD085-E8A6-8845-BD4E-CB4CCA059FC4}" type="datetimeFigureOut">
               <a:rPr lang="en-US" smtClean="0"/>
-              <a:t>10/6/26</a:t>
+              <a:t>10/7/26</a:t>
             </a:fld>
             <a:endParaRPr lang="en-US"/>
           </a:p>
@@ -5670,13 +5670,22 @@
               </a:spcAft>
             </a:pPr>
             <a:r>
-              <a:rPr sz="2800" b="1">
+              <a:rPr sz="2800" b="1" dirty="0" err="1">
                 <a:solidFill>
                   <a:srgbClr val="FFFFFF"/>
                 </a:solidFill>
                 <a:latin typeface="Aptos"/>
               </a:rPr>
-              <a:t>Sandisk ATMOS AI Appliance Portfolio</a:t>
+              <a:t>Sandisk</a:t>
+            </a:r>
+            <a:r>
+              <a:rPr sz="2800" b="1" dirty="0">
+                <a:solidFill>
+                  <a:srgbClr val="FFFFFF"/>
+                </a:solidFill>
+                <a:latin typeface="Aptos"/>
+              </a:rPr>
+              <a:t> ATMOS AI Appliance Portfolio</a:t>
             </a:r>
           </a:p>
         </p:txBody>
@@ -5989,7 +5998,7 @@
               </a:spcAft>
             </a:pPr>
             <a:r>
-              <a:rPr sz="1800" b="1">
+              <a:rPr sz="1800" b="1" dirty="0">
                 <a:solidFill>
                   <a:srgbClr val="FFFFFF"/>
                 </a:solidFill>
@@ -17722,7 +17731,7 @@
               </a:spcAft>
             </a:pPr>
             <a:r>
-              <a:rPr sz="2800" b="1">
+              <a:rPr sz="2800" b="1" dirty="0">
                 <a:solidFill>
                   <a:srgbClr val="183246"/>
                 </a:solidFill>
@@ -27479,7 +27488,7 @@
           </a:prstGeom>
           <a:extLst>
             <a:ext uri="{C572A759-6A51-4108-AA02-DFA0A04FC94B}">
-              <ma14:wrappingTextBoxFlag xmlns="" xmlns:ma14="http://schemas.microsoft.com/office/mac/drawingml/2011/main" val="0"/>
+              <ma14:wrappingTextBoxFlag xmlns:ma14="http://schemas.microsoft.com/office/mac/drawingml/2011/main" xmlns="" val="0"/>
             </a:ext>
           </a:extLst>
         </p:spPr>
